--- a/presentations/vibe-coding.pptx
+++ b/presentations/vibe-coding.pptx
@@ -3764,16 +3764,18 @@
         <p:spPr>
           <a:xfrm>
             <a:off x="1234440" y="4251960"/>
-            <a:ext cx="7452360" cy="530352"/>
-          </a:xfrm>
-          <a:prstGeom prst="rect">
-            <a:avLst/>
-          </a:prstGeom>
-          <a:noFill/>
-          <a:ln/>
-        </p:spPr>
-        <p:txBody>
-          <a:bodyPr wrap="square" lIns="0" tIns="0" rIns="0" bIns="0" rtlCol="0" anchor="ctr"/>
+            <a:ext cx="7452360" cy="498040"/>
+          </a:xfrm>
+          <a:prstGeom prst="rect">
+            <a:avLst/>
+          </a:prstGeom>
+          <a:noFill/>
+          <a:ln/>
+        </p:spPr>
+        <p:txBody>
+          <a:bodyPr wrap="square" lIns="0" tIns="0" rIns="0" bIns="0" rtlCol="0" anchor="ctr">
+            <a:normAutofit/>
+          </a:bodyPr>
           <a:lstStyle/>
           <a:p>
             <a:pPr indent="0" marL="0">
@@ -3944,7 +3946,9 @@
           <a:ln/>
         </p:spPr>
         <p:txBody>
-          <a:bodyPr wrap="square" lIns="0" tIns="0" rIns="0" bIns="0" rtlCol="0" anchor="ctr"/>
+          <a:bodyPr wrap="square" lIns="0" tIns="0" rIns="0" bIns="0" rtlCol="0" anchor="ctr">
+            <a:normAutofit/>
+          </a:bodyPr>
           <a:lstStyle/>
           <a:p>
             <a:pPr indent="0" marL="0">
@@ -6104,7 +6108,7 @@
         </p:nvSpPr>
         <p:spPr>
           <a:xfrm>
-            <a:off x="457200" y="4617720"/>
+            <a:off x="457200" y="4389960"/>
             <a:ext cx="8275320" cy="320040"/>
           </a:xfrm>
           <a:prstGeom prst="rect">
@@ -6114,7 +6118,9 @@
           <a:ln/>
         </p:spPr>
         <p:txBody>
-          <a:bodyPr wrap="square" lIns="0" tIns="0" rIns="0" bIns="0" rtlCol="0" anchor="ctr"/>
+          <a:bodyPr wrap="square" lIns="0" tIns="0" rIns="0" bIns="0" rtlCol="0" anchor="ctr">
+            <a:normAutofit/>
+          </a:bodyPr>
           <a:lstStyle/>
           <a:p>
             <a:pPr indent="0" marL="0">
@@ -7689,7 +7695,7 @@
         </p:nvSpPr>
         <p:spPr>
           <a:xfrm>
-            <a:off x="594360" y="4681728"/>
+            <a:off x="594360" y="4399960"/>
             <a:ext cx="7955280" cy="320040"/>
           </a:xfrm>
           <a:prstGeom prst="rect">
@@ -7699,7 +7705,9 @@
           <a:ln/>
         </p:spPr>
         <p:txBody>
-          <a:bodyPr wrap="square" lIns="0" tIns="0" rIns="0" bIns="0" rtlCol="0" anchor="ctr"/>
+          <a:bodyPr wrap="square" lIns="0" tIns="0" rIns="0" bIns="0" rtlCol="0" anchor="ctr">
+            <a:normAutofit/>
+          </a:bodyPr>
           <a:lstStyle/>
           <a:p>
             <a:pPr indent="0" marL="0">
@@ -8219,7 +8227,9 @@
           <a:ln/>
         </p:spPr>
         <p:txBody>
-          <a:bodyPr wrap="square" lIns="0" tIns="0" rIns="0" bIns="0" rtlCol="0" anchor="ctr"/>
+          <a:bodyPr wrap="square" lIns="0" tIns="0" rIns="0" bIns="0" rtlCol="0" anchor="ctr">
+            <a:normAutofit/>
+          </a:bodyPr>
           <a:lstStyle/>
           <a:p>
             <a:pPr indent="0" marL="0">
@@ -8824,7 +8834,9 @@
           <a:ln/>
         </p:spPr>
         <p:txBody>
-          <a:bodyPr wrap="square" lIns="0" tIns="0" rIns="0" bIns="0" rtlCol="0" anchor="ctr"/>
+          <a:bodyPr wrap="square" lIns="0" tIns="0" rIns="0" bIns="0" rtlCol="0" anchor="ctr">
+            <a:normAutofit/>
+          </a:bodyPr>
           <a:lstStyle/>
           <a:p>
             <a:pPr indent="0" marL="0">
@@ -9427,16 +9439,18 @@
         <p:spPr>
           <a:xfrm>
             <a:off x="1234440" y="4315968"/>
-            <a:ext cx="7452360" cy="502920"/>
-          </a:xfrm>
-          <a:prstGeom prst="rect">
-            <a:avLst/>
-          </a:prstGeom>
-          <a:noFill/>
-          <a:ln/>
-        </p:spPr>
-        <p:txBody>
-          <a:bodyPr wrap="square" lIns="0" tIns="0" rIns="0" bIns="0" rtlCol="0" anchor="ctr"/>
+            <a:ext cx="7452360" cy="434032"/>
+          </a:xfrm>
+          <a:prstGeom prst="rect">
+            <a:avLst/>
+          </a:prstGeom>
+          <a:noFill/>
+          <a:ln/>
+        </p:spPr>
+        <p:txBody>
+          <a:bodyPr wrap="square" lIns="0" tIns="0" rIns="0" bIns="0" rtlCol="0" anchor="ctr">
+            <a:normAutofit/>
+          </a:bodyPr>
           <a:lstStyle/>
           <a:p>
             <a:pPr indent="0" marL="0">
@@ -9451,7 +9465,7 @@
                 <a:ea typeface="Calibri" pitchFamily="34" charset="-122"/>
                 <a:cs typeface="Calibri" pitchFamily="34" charset="-120"/>
               </a:rPr>
-              <a:t>Cursor: $1B → $2B ARR in 3 months (Nov 2025 – Feb 2026), $29.3B valuation. Claude Code + Cursor = over half of primary-tool choices</a:t>
+              <a:t>Cursor: $1B → $4B ARR (Jan–Jun 2026); acquired by SpaceX for $60B (June 16, 2026). Claude Code + Cursor = over half of primary-tool choices</a:t>
             </a:r>
             <a:endParaRPr lang="en-US" sz="1200" dirty="0"/>
           </a:p>
@@ -10124,7 +10138,7 @@
         </p:nvSpPr>
         <p:spPr>
           <a:xfrm>
-            <a:off x="457200" y="4617720"/>
+            <a:off x="457200" y="4389960"/>
             <a:ext cx="8229600" cy="320040"/>
           </a:xfrm>
           <a:prstGeom prst="rect">
@@ -10134,7 +10148,9 @@
           <a:ln/>
         </p:spPr>
         <p:txBody>
-          <a:bodyPr wrap="square" lIns="0" tIns="0" rIns="0" bIns="0" rtlCol="0" anchor="ctr"/>
+          <a:bodyPr wrap="square" lIns="0" tIns="0" rIns="0" bIns="0" rtlCol="0" anchor="ctr">
+            <a:normAutofit/>
+          </a:bodyPr>
           <a:lstStyle/>
           <a:p>
             <a:pPr algn="ctr" indent="0" marL="0">
@@ -12515,7 +12531,9 @@
           <a:ln/>
         </p:spPr>
         <p:txBody>
-          <a:bodyPr wrap="square" lIns="0" tIns="0" rIns="0" bIns="0" rtlCol="0" anchor="ctr"/>
+          <a:bodyPr wrap="square" lIns="0" tIns="0" rIns="0" bIns="0" rtlCol="0" anchor="ctr">
+            <a:normAutofit/>
+          </a:bodyPr>
           <a:lstStyle/>
           <a:p>
             <a:pPr indent="0" marL="0">
@@ -12568,7 +12586,9 @@
           <a:ln/>
         </p:spPr>
         <p:txBody>
-          <a:bodyPr wrap="square" lIns="0" tIns="0" rIns="0" bIns="0" rtlCol="0" anchor="ctr"/>
+          <a:bodyPr wrap="square" lIns="0" tIns="0" rIns="0" bIns="0" rtlCol="0" anchor="ctr">
+            <a:normAutofit/>
+          </a:bodyPr>
           <a:lstStyle/>
           <a:p>
             <a:pPr indent="0" marL="0">
